--- a/UPI_Transaction_Insights_Communication_Slides.pptx
+++ b/UPI_Transaction_Insights_Communication_Slides.pptx
@@ -7063,7 +7063,15 @@
           <a:p>
             <a:r>
               <a:rPr lang="en-IN" dirty="0"/>
-              <a:t>Android Failure Rate = 8.17%. This is the highest among device types.</a:t>
+              <a:t>Android Failure Rate </a:t>
+            </a:r>
+            <a:r>
+              <a:rPr lang="en-IN"/>
+              <a:t>= 6.06%. </a:t>
+            </a:r>
+            <a:r>
+              <a:rPr lang="en-IN" dirty="0"/>
+              <a:t>This is the highest among device types.</a:t>
             </a:r>
           </a:p>
           <a:p>
